--- a/산출물/실전반/이론_오프라인/05회차/실전반_오프라인_05회차.pptx
+++ b/산출물/실전반/이론_오프라인/05회차/실전반_오프라인_05회차.pptx
@@ -546,11 +546,6 @@
           </a:p>
           <a:p>
             <a:r>
-              <a:t>· 이론은 온라인 교재의 스킬 · MCP 장에서 오늘 실습에 쓰는 것만</a:t>
-            </a:r>
-          </a:p>
-          <a:p>
-            <a:r>
               <a:t>[다음] 학습목표</a:t>
             </a:r>
           </a:p>
@@ -726,7 +721,7 @@
           </a:p>
           <a:p>
             <a:r>
-              <a:t>· 실습에서 만들 다음 협의 안건의 꼴이 이 단원</a:t>
+              <a:t>· 같은 틀의 회의 후속 스킬 → 결정할 질문 · 확인된 사실 · 남은 확인으로 나눈 안건</a:t>
             </a:r>
           </a:p>
           <a:p>
@@ -1011,7 +1006,7 @@
           </a:p>
           <a:p>
             <a:r>
-              <a:t>· 실습에서 파일 · Git · 시간 서버의 접근 범위를 정하고, 제공 골격에 점검 메모 조회 함수를 구현해 부른다</a:t>
+              <a:t>· 스킬이 적은 것과 도구가 실행한 것 → 공통 규약 MCP → 네 구성요소 → 도구 목록과 호출 한 건</a:t>
             </a:r>
           </a:p>
           <a:p>
@@ -2741,7 +2736,7 @@
           </a:p>
           <a:p>
             <a:r>
-              <a:t>· 이어지는 실습: 파일 · Git · 시간 MCP를 연결하고, 회의록 두 건 · 점검 메모에서 결정 · 담당 · 기한 · 근거를 뽑는 스킬(없으면 미정)을 만든 뒤, 점검 메모 조회 함수를 구현해 조회 실패와 자료 없음을 가른다</a:t>
+              <a:t>· 이어지는 실습: 파일 · Git · 시간 MCP를 필요한 범위만 열어 연결하고, 회의록 두 건 · 점검 메모에서 결정 · 담당 · 기한 · 근거를 뽑는 스킬(없으면 미정)을 만든 뒤, 점검 메모 조회 함수를 구현해 조회 실패와 자료 없음을 가른다</a:t>
             </a:r>
           </a:p>
           <a:p>
@@ -2836,7 +2831,7 @@
           </a:p>
           <a:p>
             <a:r>
-              <a:t>· 실습에서 회의록 두 건과 점검 메모로 결정 · 담당 · 기한 · 근거를 뽑는 스킬을 만든다</a:t>
+              <a:t>· 회의록마다 다시 정하는 넷 → 스킬과 SKILL.md → 원문의 여섯 자리 → 프롬프트와 스킬 → 스킬에 적지 않을 것 → 판단 문제</a:t>
             </a:r>
           </a:p>
           <a:p>
